--- a/presentations/research-hybrid-credentials/Research_Hybrid_Credentials_Narrated.pptx
+++ b/presentations/research-hybrid-credentials/Research_Hybrid_Credentials_Narrated.pptx
@@ -201,7 +201,7 @@
     </p:spTree>
     <p:extLst>
       <p:ext uri="{BB962C8B-B14F-4D97-AF65-F5344CB8AC3E}">
-        <p14:creationId xmlns:p14="http://schemas.microsoft.com/office/powerpoint/2010/main" val="990757167"/>
+        <p14:creationId xmlns:p14="http://schemas.microsoft.com/office/powerpoint/2010/main" val="328443270"/>
       </p:ext>
     </p:extLst>
   </p:cSld>
@@ -2756,7 +2756,7 @@
             <a:hlinkClick r:id="" action="ppaction://media"/>
             <a:extLst>
               <a:ext uri="{FF2B5EF4-FFF2-40B4-BE49-F238E27FC236}">
-                <a16:creationId xmlns:a16="http://schemas.microsoft.com/office/drawing/2014/main" id="{125E996C-7DAC-B063-6556-300651B0DAD6}"/>
+                <a16:creationId xmlns:a16="http://schemas.microsoft.com/office/drawing/2014/main" id="{EC4B5D7A-0967-5E34-7E28-836B693909F3}"/>
               </a:ext>
             </a:extLst>
           </p:cNvPr>
@@ -2772,7 +2772,7 @@
                     <p:ext uri="{3AFAAA56-56D3-431D-BCD4-E75A35582382}">
                       <p173:tracksInfo xmlns:p173="http://schemas.microsoft.com/office/powerpoint/2017/3/main" displayLoc="slide">
                         <p173:trackLst>
-                          <p173:track id="{F9FD6CF3-CC7F-49E5-B734-50DE2E6AAEA0}" label="English (captions)" lang="en-US" r:embed="rId6"/>
+                          <p173:track id="{FFADAFB8-B00B-4AB5-B73B-0F103A5F17BA}" label="English (captions)" lang="en-US" r:embed="rId6"/>
                         </p173:trackLst>
                       </p173:tracksInfo>
                     </p:ext>
@@ -2790,7 +2790,7 @@
         </p:blipFill>
         <p:spPr>
           <a:xfrm>
-            <a:off x="127000" y="6350000"/>
+            <a:off x="12446000" y="127000"/>
             <a:ext cx="304800" cy="304800"/>
           </a:xfrm>
           <a:prstGeom prst="rect">
@@ -3795,7 +3795,7 @@
             <a:hlinkClick r:id="" action="ppaction://media"/>
             <a:extLst>
               <a:ext uri="{FF2B5EF4-FFF2-40B4-BE49-F238E27FC236}">
-                <a16:creationId xmlns:a16="http://schemas.microsoft.com/office/drawing/2014/main" id="{9B6AC25F-7C44-34CF-F5AD-A2BAD03F251E}"/>
+                <a16:creationId xmlns:a16="http://schemas.microsoft.com/office/drawing/2014/main" id="{F8F3E749-CEA4-3B9D-A452-9AD51BCC9C59}"/>
               </a:ext>
             </a:extLst>
           </p:cNvPr>
@@ -3811,7 +3811,7 @@
                     <p:ext uri="{3AFAAA56-56D3-431D-BCD4-E75A35582382}">
                       <p173:tracksInfo xmlns:p173="http://schemas.microsoft.com/office/powerpoint/2017/3/main" displayLoc="slide">
                         <p173:trackLst>
-                          <p173:track id="{F81B975D-1760-4068-9F78-6D3F0C58DF79}" label="English (captions)" lang="en-US" r:embed="rId6"/>
+                          <p173:track id="{172A28D1-B59F-4A8D-95C9-A41FC18D7219}" label="English (captions)" lang="en-US" r:embed="rId6"/>
                         </p173:trackLst>
                       </p173:tracksInfo>
                     </p:ext>
@@ -3829,7 +3829,7 @@
         </p:blipFill>
         <p:spPr>
           <a:xfrm>
-            <a:off x="127000" y="6350000"/>
+            <a:off x="12446000" y="127000"/>
             <a:ext cx="304800" cy="304800"/>
           </a:xfrm>
           <a:prstGeom prst="rect">
@@ -4680,7 +4680,7 @@
             <a:hlinkClick r:id="" action="ppaction://media"/>
             <a:extLst>
               <a:ext uri="{FF2B5EF4-FFF2-40B4-BE49-F238E27FC236}">
-                <a16:creationId xmlns:a16="http://schemas.microsoft.com/office/drawing/2014/main" id="{FF0583FD-7D08-25CD-A375-962A891F6CDF}"/>
+                <a16:creationId xmlns:a16="http://schemas.microsoft.com/office/drawing/2014/main" id="{BCE20819-978E-6B34-7362-CA8940B198DA}"/>
               </a:ext>
             </a:extLst>
           </p:cNvPr>
@@ -4696,7 +4696,7 @@
                     <p:ext uri="{3AFAAA56-56D3-431D-BCD4-E75A35582382}">
                       <p173:tracksInfo xmlns:p173="http://schemas.microsoft.com/office/powerpoint/2017/3/main" displayLoc="slide">
                         <p173:trackLst>
-                          <p173:track id="{647A5F26-3946-4B93-807F-9F86794F1F88}" label="English (captions)" lang="en-US" r:embed="rId6"/>
+                          <p173:track id="{C46A6D60-759C-4A71-A0C2-F10D67550876}" label="English (captions)" lang="en-US" r:embed="rId6"/>
                         </p173:trackLst>
                       </p173:tracksInfo>
                     </p:ext>
@@ -4714,7 +4714,7 @@
         </p:blipFill>
         <p:spPr>
           <a:xfrm>
-            <a:off x="127000" y="6350000"/>
+            <a:off x="12446000" y="127000"/>
             <a:ext cx="304800" cy="304800"/>
           </a:xfrm>
           <a:prstGeom prst="rect">
@@ -5721,7 +5721,7 @@
             <a:hlinkClick r:id="" action="ppaction://media"/>
             <a:extLst>
               <a:ext uri="{FF2B5EF4-FFF2-40B4-BE49-F238E27FC236}">
-                <a16:creationId xmlns:a16="http://schemas.microsoft.com/office/drawing/2014/main" id="{EBF5C017-98D9-830A-313D-8EA63197AAA0}"/>
+                <a16:creationId xmlns:a16="http://schemas.microsoft.com/office/drawing/2014/main" id="{D6CFA5A3-41C8-1FDD-A737-756185E1FAF2}"/>
               </a:ext>
             </a:extLst>
           </p:cNvPr>
@@ -5737,7 +5737,7 @@
                     <p:ext uri="{3AFAAA56-56D3-431D-BCD4-E75A35582382}">
                       <p173:tracksInfo xmlns:p173="http://schemas.microsoft.com/office/powerpoint/2017/3/main" displayLoc="slide">
                         <p173:trackLst>
-                          <p173:track id="{C6FBE8ED-EDA4-4175-AE24-E4E7893A3DF1}" label="English (captions)" lang="en-US" r:embed="rId6"/>
+                          <p173:track id="{408F0316-CD2A-4586-8AB7-F61DE0479E8A}" label="English (captions)" lang="en-US" r:embed="rId6"/>
                         </p173:trackLst>
                       </p173:tracksInfo>
                     </p:ext>
@@ -5755,7 +5755,7 @@
         </p:blipFill>
         <p:spPr>
           <a:xfrm>
-            <a:off x="127000" y="6350000"/>
+            <a:off x="12446000" y="127000"/>
             <a:ext cx="304800" cy="304800"/>
           </a:xfrm>
           <a:prstGeom prst="rect">
@@ -6275,7 +6275,7 @@
             <a:hlinkClick r:id="" action="ppaction://media"/>
             <a:extLst>
               <a:ext uri="{FF2B5EF4-FFF2-40B4-BE49-F238E27FC236}">
-                <a16:creationId xmlns:a16="http://schemas.microsoft.com/office/drawing/2014/main" id="{564681DF-7367-000B-FE47-67D7A63BE4EC}"/>
+                <a16:creationId xmlns:a16="http://schemas.microsoft.com/office/drawing/2014/main" id="{F928319F-BF27-F4CC-EF5B-2422E4B4EC0F}"/>
               </a:ext>
             </a:extLst>
           </p:cNvPr>
@@ -6291,7 +6291,7 @@
                     <p:ext uri="{3AFAAA56-56D3-431D-BCD4-E75A35582382}">
                       <p173:tracksInfo xmlns:p173="http://schemas.microsoft.com/office/powerpoint/2017/3/main" displayLoc="slide">
                         <p173:trackLst>
-                          <p173:track id="{F1AF0216-76FC-42E1-8748-7EF5EC4F3375}" label="English (captions)" lang="en-US" r:embed="rId7"/>
+                          <p173:track id="{FC101270-D226-41AE-BB61-0438557019F8}" label="English (captions)" lang="en-US" r:embed="rId7"/>
                         </p173:trackLst>
                       </p173:tracksInfo>
                     </p:ext>
@@ -6309,7 +6309,7 @@
         </p:blipFill>
         <p:spPr>
           <a:xfrm>
-            <a:off x="127000" y="6350000"/>
+            <a:off x="12446000" y="127000"/>
             <a:ext cx="304800" cy="304800"/>
           </a:xfrm>
           <a:prstGeom prst="rect">
@@ -6979,7 +6979,7 @@
             <a:hlinkClick r:id="" action="ppaction://media"/>
             <a:extLst>
               <a:ext uri="{FF2B5EF4-FFF2-40B4-BE49-F238E27FC236}">
-                <a16:creationId xmlns:a16="http://schemas.microsoft.com/office/drawing/2014/main" id="{7FAF3651-352A-CB13-6D79-E13BBD47A933}"/>
+                <a16:creationId xmlns:a16="http://schemas.microsoft.com/office/drawing/2014/main" id="{99B36F9C-62EC-1606-FF72-715B2CE3320C}"/>
               </a:ext>
             </a:extLst>
           </p:cNvPr>
@@ -6995,7 +6995,7 @@
                     <p:ext uri="{3AFAAA56-56D3-431D-BCD4-E75A35582382}">
                       <p173:tracksInfo xmlns:p173="http://schemas.microsoft.com/office/powerpoint/2017/3/main" displayLoc="slide">
                         <p173:trackLst>
-                          <p173:track id="{B4AE4C65-2CB9-48ED-9706-215AE338850A}" label="English (captions)" lang="en-US" r:embed="rId7"/>
+                          <p173:track id="{07B17B4C-D4A9-4CE1-A6A2-9D0537104827}" label="English (captions)" lang="en-US" r:embed="rId7"/>
                         </p173:trackLst>
                       </p173:tracksInfo>
                     </p:ext>
@@ -7013,7 +7013,7 @@
         </p:blipFill>
         <p:spPr>
           <a:xfrm>
-            <a:off x="127000" y="6350000"/>
+            <a:off x="12446000" y="127000"/>
             <a:ext cx="304800" cy="304800"/>
           </a:xfrm>
           <a:prstGeom prst="rect">
@@ -8493,7 +8493,7 @@
             <a:hlinkClick r:id="" action="ppaction://media"/>
             <a:extLst>
               <a:ext uri="{FF2B5EF4-FFF2-40B4-BE49-F238E27FC236}">
-                <a16:creationId xmlns:a16="http://schemas.microsoft.com/office/drawing/2014/main" id="{B6A08A2E-5B49-5C82-97EA-96F1730B5A9A}"/>
+                <a16:creationId xmlns:a16="http://schemas.microsoft.com/office/drawing/2014/main" id="{C93D0782-A567-C253-63AA-1A61DD6DF695}"/>
               </a:ext>
             </a:extLst>
           </p:cNvPr>
@@ -8509,7 +8509,7 @@
                     <p:ext uri="{3AFAAA56-56D3-431D-BCD4-E75A35582382}">
                       <p173:tracksInfo xmlns:p173="http://schemas.microsoft.com/office/powerpoint/2017/3/main" displayLoc="slide">
                         <p173:trackLst>
-                          <p173:track id="{4FC424E7-F9FD-4797-8DAD-D473F47EB3E3}" label="English (captions)" lang="en-US" r:embed="rId6"/>
+                          <p173:track id="{8DCA1A2F-E7FB-4699-B21A-C15E44BB45D4}" label="English (captions)" lang="en-US" r:embed="rId6"/>
                         </p173:trackLst>
                       </p173:tracksInfo>
                     </p:ext>
@@ -8527,7 +8527,7 @@
         </p:blipFill>
         <p:spPr>
           <a:xfrm>
-            <a:off x="127000" y="6350000"/>
+            <a:off x="12446000" y="127000"/>
             <a:ext cx="304800" cy="304800"/>
           </a:xfrm>
           <a:prstGeom prst="rect">
@@ -12239,7 +12239,7 @@
             <a:hlinkClick r:id="" action="ppaction://media"/>
             <a:extLst>
               <a:ext uri="{FF2B5EF4-FFF2-40B4-BE49-F238E27FC236}">
-                <a16:creationId xmlns:a16="http://schemas.microsoft.com/office/drawing/2014/main" id="{3EC003E9-150A-FEE0-695D-DF34CAAF55C3}"/>
+                <a16:creationId xmlns:a16="http://schemas.microsoft.com/office/drawing/2014/main" id="{F6DC0D24-39A4-A75A-E1F6-8D85F2AF997A}"/>
               </a:ext>
             </a:extLst>
           </p:cNvPr>
@@ -12255,7 +12255,7 @@
                     <p:ext uri="{3AFAAA56-56D3-431D-BCD4-E75A35582382}">
                       <p173:tracksInfo xmlns:p173="http://schemas.microsoft.com/office/powerpoint/2017/3/main" displayLoc="slide">
                         <p173:trackLst>
-                          <p173:track id="{7C08E4E2-359E-4488-9DDD-24A1E9562F73}" label="English (captions)" lang="en-US" r:embed="rId6"/>
+                          <p173:track id="{DF03662E-FC69-4F6E-B494-E39737D58AE1}" label="English (captions)" lang="en-US" r:embed="rId6"/>
                         </p173:trackLst>
                       </p173:tracksInfo>
                     </p:ext>
@@ -12273,7 +12273,7 @@
         </p:blipFill>
         <p:spPr>
           <a:xfrm>
-            <a:off x="127000" y="6350000"/>
+            <a:off x="12446000" y="127000"/>
             <a:ext cx="304800" cy="304800"/>
           </a:xfrm>
           <a:prstGeom prst="rect">
@@ -12939,7 +12939,7 @@
             <a:hlinkClick r:id="" action="ppaction://media"/>
             <a:extLst>
               <a:ext uri="{FF2B5EF4-FFF2-40B4-BE49-F238E27FC236}">
-                <a16:creationId xmlns:a16="http://schemas.microsoft.com/office/drawing/2014/main" id="{E19A8CCE-63C6-3097-865A-B69C14D10E99}"/>
+                <a16:creationId xmlns:a16="http://schemas.microsoft.com/office/drawing/2014/main" id="{26D6D89D-181A-CC24-CF39-6F4423125055}"/>
               </a:ext>
             </a:extLst>
           </p:cNvPr>
@@ -12955,7 +12955,7 @@
                     <p:ext uri="{3AFAAA56-56D3-431D-BCD4-E75A35582382}">
                       <p173:tracksInfo xmlns:p173="http://schemas.microsoft.com/office/powerpoint/2017/3/main" displayLoc="slide">
                         <p173:trackLst>
-                          <p173:track id="{BA8EAF2D-F06C-4BB3-88B8-11CCACD16068}" label="English (captions)" lang="en-US" r:embed="rId6"/>
+                          <p173:track id="{E8C6CCA2-6392-4911-9462-A4F7E6822AB2}" label="English (captions)" lang="en-US" r:embed="rId6"/>
                         </p173:trackLst>
                       </p173:tracksInfo>
                     </p:ext>
@@ -12973,7 +12973,7 @@
         </p:blipFill>
         <p:spPr>
           <a:xfrm>
-            <a:off x="127000" y="6350000"/>
+            <a:off x="12446000" y="127000"/>
             <a:ext cx="304800" cy="304800"/>
           </a:xfrm>
           <a:prstGeom prst="rect">
@@ -14741,7 +14741,7 @@
             <a:hlinkClick r:id="" action="ppaction://media"/>
             <a:extLst>
               <a:ext uri="{FF2B5EF4-FFF2-40B4-BE49-F238E27FC236}">
-                <a16:creationId xmlns:a16="http://schemas.microsoft.com/office/drawing/2014/main" id="{A3DCA8DC-A519-EB15-E740-514DF798D0F6}"/>
+                <a16:creationId xmlns:a16="http://schemas.microsoft.com/office/drawing/2014/main" id="{DF186FD9-389F-1207-32B6-C1A4EDFC2BC9}"/>
               </a:ext>
             </a:extLst>
           </p:cNvPr>
@@ -14757,7 +14757,7 @@
                     <p:ext uri="{3AFAAA56-56D3-431D-BCD4-E75A35582382}">
                       <p173:tracksInfo xmlns:p173="http://schemas.microsoft.com/office/powerpoint/2017/3/main" displayLoc="slide">
                         <p173:trackLst>
-                          <p173:track id="{51B4773A-5172-4EC7-B5C4-3DD23BF325D3}" label="English (captions)" lang="en-US" r:embed="rId7"/>
+                          <p173:track id="{86F92C39-3642-443F-BD9C-BEEE56A45B82}" label="English (captions)" lang="en-US" r:embed="rId7"/>
                         </p173:trackLst>
                       </p173:tracksInfo>
                     </p:ext>
@@ -14775,7 +14775,7 @@
         </p:blipFill>
         <p:spPr>
           <a:xfrm>
-            <a:off x="127000" y="6350000"/>
+            <a:off x="12446000" y="127000"/>
             <a:ext cx="304800" cy="304800"/>
           </a:xfrm>
           <a:prstGeom prst="rect">
@@ -16342,7 +16342,7 @@
             <a:hlinkClick r:id="" action="ppaction://media"/>
             <a:extLst>
               <a:ext uri="{FF2B5EF4-FFF2-40B4-BE49-F238E27FC236}">
-                <a16:creationId xmlns:a16="http://schemas.microsoft.com/office/drawing/2014/main" id="{A35E87CF-A642-EED3-CC56-E0CAF0A4EBAA}"/>
+                <a16:creationId xmlns:a16="http://schemas.microsoft.com/office/drawing/2014/main" id="{CE581AA5-A73D-3AD4-6EE0-D2D8D64C4EC2}"/>
               </a:ext>
             </a:extLst>
           </p:cNvPr>
@@ -16358,7 +16358,7 @@
                     <p:ext uri="{3AFAAA56-56D3-431D-BCD4-E75A35582382}">
                       <p173:tracksInfo xmlns:p173="http://schemas.microsoft.com/office/powerpoint/2017/3/main" displayLoc="slide">
                         <p173:trackLst>
-                          <p173:track id="{C444BA76-8638-4DD9-BDFC-697C265F8A88}" label="English (captions)" lang="en-US" r:embed="rId6"/>
+                          <p173:track id="{845393FB-D39B-461C-A4EF-0685EFE3D258}" label="English (captions)" lang="en-US" r:embed="rId6"/>
                         </p173:trackLst>
                       </p173:tracksInfo>
                     </p:ext>
@@ -16376,7 +16376,7 @@
         </p:blipFill>
         <p:spPr>
           <a:xfrm>
-            <a:off x="127000" y="6350000"/>
+            <a:off x="12446000" y="127000"/>
             <a:ext cx="304800" cy="304800"/>
           </a:xfrm>
           <a:prstGeom prst="rect">
@@ -16708,7 +16708,7 @@
             <a:hlinkClick r:id="" action="ppaction://media"/>
             <a:extLst>
               <a:ext uri="{FF2B5EF4-FFF2-40B4-BE49-F238E27FC236}">
-                <a16:creationId xmlns:a16="http://schemas.microsoft.com/office/drawing/2014/main" id="{A75A7A5E-B8BF-7D04-F3AC-8A708AAEC767}"/>
+                <a16:creationId xmlns:a16="http://schemas.microsoft.com/office/drawing/2014/main" id="{CB14EB6A-AAB9-F8C8-22F5-5A39CCED816B}"/>
               </a:ext>
             </a:extLst>
           </p:cNvPr>
@@ -16724,7 +16724,7 @@
                     <p:ext uri="{3AFAAA56-56D3-431D-BCD4-E75A35582382}">
                       <p173:tracksInfo xmlns:p173="http://schemas.microsoft.com/office/powerpoint/2017/3/main" displayLoc="slide">
                         <p173:trackLst>
-                          <p173:track id="{BD987125-236E-4827-90FF-23BCBE9ABA10}" label="English (captions)" lang="en-US" r:embed="rId7"/>
+                          <p173:track id="{F85ADA52-BCD2-4718-BBAE-70100AB07FE2}" label="English (captions)" lang="en-US" r:embed="rId7"/>
                         </p173:trackLst>
                       </p173:tracksInfo>
                     </p:ext>
@@ -16742,7 +16742,7 @@
         </p:blipFill>
         <p:spPr>
           <a:xfrm>
-            <a:off x="127000" y="6350000"/>
+            <a:off x="12446000" y="127000"/>
             <a:ext cx="304800" cy="304800"/>
           </a:xfrm>
           <a:prstGeom prst="rect">
@@ -17460,7 +17460,7 @@
             <a:hlinkClick r:id="" action="ppaction://media"/>
             <a:extLst>
               <a:ext uri="{FF2B5EF4-FFF2-40B4-BE49-F238E27FC236}">
-                <a16:creationId xmlns:a16="http://schemas.microsoft.com/office/drawing/2014/main" id="{9F0062CE-4C19-F190-A0B1-7F6ADC43A60E}"/>
+                <a16:creationId xmlns:a16="http://schemas.microsoft.com/office/drawing/2014/main" id="{D06C610F-83E3-A5EB-FE22-BD56B0919C1F}"/>
               </a:ext>
             </a:extLst>
           </p:cNvPr>
@@ -17476,7 +17476,7 @@
                     <p:ext uri="{3AFAAA56-56D3-431D-BCD4-E75A35582382}">
                       <p173:tracksInfo xmlns:p173="http://schemas.microsoft.com/office/powerpoint/2017/3/main" displayLoc="slide">
                         <p173:trackLst>
-                          <p173:track id="{849133A0-D60F-4635-9950-1DE0CBF17758}" label="English (captions)" lang="en-US" r:embed="rId6"/>
+                          <p173:track id="{6DF78959-3805-4EB4-BB41-8B4B818BCE04}" label="English (captions)" lang="en-US" r:embed="rId6"/>
                         </p173:trackLst>
                       </p173:tracksInfo>
                     </p:ext>
@@ -17494,7 +17494,7 @@
         </p:blipFill>
         <p:spPr>
           <a:xfrm>
-            <a:off x="127000" y="6350000"/>
+            <a:off x="12446000" y="127000"/>
             <a:ext cx="304800" cy="304800"/>
           </a:xfrm>
           <a:prstGeom prst="rect">
@@ -19119,7 +19119,7 @@
             <a:hlinkClick r:id="" action="ppaction://media"/>
             <a:extLst>
               <a:ext uri="{FF2B5EF4-FFF2-40B4-BE49-F238E27FC236}">
-                <a16:creationId xmlns:a16="http://schemas.microsoft.com/office/drawing/2014/main" id="{E9E3145B-740F-8FED-AC70-779BFD0D2B50}"/>
+                <a16:creationId xmlns:a16="http://schemas.microsoft.com/office/drawing/2014/main" id="{B041CA3D-A237-8482-BE7E-43ED12BB6587}"/>
               </a:ext>
             </a:extLst>
           </p:cNvPr>
@@ -19135,7 +19135,7 @@
                     <p:ext uri="{3AFAAA56-56D3-431D-BCD4-E75A35582382}">
                       <p173:tracksInfo xmlns:p173="http://schemas.microsoft.com/office/powerpoint/2017/3/main" displayLoc="slide">
                         <p173:trackLst>
-                          <p173:track id="{8CFE6268-D320-40CE-94A9-C2896E09CF64}" label="English (captions)" lang="en-US" r:embed="rId7"/>
+                          <p173:track id="{D62EAA36-168D-40C6-BCBD-05B4046D3C34}" label="English (captions)" lang="en-US" r:embed="rId7"/>
                         </p173:trackLst>
                       </p173:tracksInfo>
                     </p:ext>
@@ -19153,7 +19153,7 @@
         </p:blipFill>
         <p:spPr>
           <a:xfrm>
-            <a:off x="127000" y="6350000"/>
+            <a:off x="12446000" y="127000"/>
             <a:ext cx="304800" cy="304800"/>
           </a:xfrm>
           <a:prstGeom prst="rect">
@@ -19485,7 +19485,7 @@
             <a:hlinkClick r:id="" action="ppaction://media"/>
             <a:extLst>
               <a:ext uri="{FF2B5EF4-FFF2-40B4-BE49-F238E27FC236}">
-                <a16:creationId xmlns:a16="http://schemas.microsoft.com/office/drawing/2014/main" id="{66B3C309-8A62-228E-4E64-50C5F9FFFDF4}"/>
+                <a16:creationId xmlns:a16="http://schemas.microsoft.com/office/drawing/2014/main" id="{DBA262B0-79C0-3396-470F-A6B79E62E10C}"/>
               </a:ext>
             </a:extLst>
           </p:cNvPr>
@@ -19501,7 +19501,7 @@
                     <p:ext uri="{3AFAAA56-56D3-431D-BCD4-E75A35582382}">
                       <p173:tracksInfo xmlns:p173="http://schemas.microsoft.com/office/powerpoint/2017/3/main" displayLoc="slide">
                         <p173:trackLst>
-                          <p173:track id="{3038391D-090E-47D0-A2FD-D9C4594E6B07}" label="English (captions)" lang="en-US" r:embed="rId7"/>
+                          <p173:track id="{2A27701F-C270-441A-8035-78136D502CCF}" label="English (captions)" lang="en-US" r:embed="rId7"/>
                         </p173:trackLst>
                       </p173:tracksInfo>
                     </p:ext>
@@ -19519,7 +19519,7 @@
         </p:blipFill>
         <p:spPr>
           <a:xfrm>
-            <a:off x="127000" y="6350000"/>
+            <a:off x="12446000" y="127000"/>
             <a:ext cx="304800" cy="304800"/>
           </a:xfrm>
           <a:prstGeom prst="rect">
@@ -21144,7 +21144,7 @@
             <a:hlinkClick r:id="" action="ppaction://media"/>
             <a:extLst>
               <a:ext uri="{FF2B5EF4-FFF2-40B4-BE49-F238E27FC236}">
-                <a16:creationId xmlns:a16="http://schemas.microsoft.com/office/drawing/2014/main" id="{CD452914-E2EC-44A0-B3B7-3C902AFA9B67}"/>
+                <a16:creationId xmlns:a16="http://schemas.microsoft.com/office/drawing/2014/main" id="{2DDFF129-6AFE-2FB0-C498-81A2BAF3A27F}"/>
               </a:ext>
             </a:extLst>
           </p:cNvPr>
@@ -21160,7 +21160,7 @@
                     <p:ext uri="{3AFAAA56-56D3-431D-BCD4-E75A35582382}">
                       <p173:tracksInfo xmlns:p173="http://schemas.microsoft.com/office/powerpoint/2017/3/main" displayLoc="slide">
                         <p173:trackLst>
-                          <p173:track id="{D91689E0-DE28-4033-9FED-75FA3CEE44C9}" label="English (captions)" lang="en-US" r:embed="rId7"/>
+                          <p173:track id="{3B022550-EC9B-4738-9204-BADBB2488D65}" label="English (captions)" lang="en-US" r:embed="rId7"/>
                         </p173:trackLst>
                       </p173:tracksInfo>
                     </p:ext>
@@ -21178,7 +21178,7 @@
         </p:blipFill>
         <p:spPr>
           <a:xfrm>
-            <a:off x="127000" y="6350000"/>
+            <a:off x="12446000" y="127000"/>
             <a:ext cx="304800" cy="304800"/>
           </a:xfrm>
           <a:prstGeom prst="rect">
@@ -21510,7 +21510,7 @@
             <a:hlinkClick r:id="" action="ppaction://media"/>
             <a:extLst>
               <a:ext uri="{FF2B5EF4-FFF2-40B4-BE49-F238E27FC236}">
-                <a16:creationId xmlns:a16="http://schemas.microsoft.com/office/drawing/2014/main" id="{CAA3E14C-550A-DB05-C566-C528CB44015D}"/>
+                <a16:creationId xmlns:a16="http://schemas.microsoft.com/office/drawing/2014/main" id="{0444074F-5770-2A72-DF27-EFEDAAB71F8A}"/>
               </a:ext>
             </a:extLst>
           </p:cNvPr>
@@ -21526,7 +21526,7 @@
                     <p:ext uri="{3AFAAA56-56D3-431D-BCD4-E75A35582382}">
                       <p173:tracksInfo xmlns:p173="http://schemas.microsoft.com/office/powerpoint/2017/3/main" displayLoc="slide">
                         <p173:trackLst>
-                          <p173:track id="{1EE3BCFF-D482-4AEB-BFBC-0333278A61F1}" label="English (captions)" lang="en-US" r:embed="rId7"/>
+                          <p173:track id="{5E9BAFE2-4F29-44DE-AA73-8E66032CFD8C}" label="English (captions)" lang="en-US" r:embed="rId7"/>
                         </p173:trackLst>
                       </p173:tracksInfo>
                     </p:ext>
@@ -21544,7 +21544,7 @@
         </p:blipFill>
         <p:spPr>
           <a:xfrm>
-            <a:off x="127000" y="6350000"/>
+            <a:off x="12446000" y="127000"/>
             <a:ext cx="304800" cy="304800"/>
           </a:xfrm>
           <a:prstGeom prst="rect">
